--- a/docs/deliverables/out/Drop-1_Transactional/BRD-01_New_Business/01_BIBS_GuideDeck_BRD-01_New_Business_v2.0.pptx
+++ b/docs/deliverables/out/Drop-1_Transactional/BRD-01_New_Business/01_BIBS_GuideDeck_BRD-01_New_Business_v2.0.pptx
@@ -7686,7 +7686,7 @@
                 </a:solidFill>
                 <a:latin typeface="Arial"/>
               </a:rPr>
-              <a:t>Full list: FRS chapter 13 per screen, 109 rules on the Business rules sheet and 498 messages in chapter 15 and on the Messages sheet</a:t>
+              <a:t>Full list: FRS chapter 13 per screen, 109 rules on the Business rules sheet and 525 messages in chapter 15 and on the Messages sheet</a:t>
             </a:r>
           </a:p>
         </p:txBody>
@@ -12124,7 +12124,7 @@
                 </a:solidFill>
                 <a:latin typeface="Arial"/>
               </a:rPr>
-              <a:t>Content: 46 screens, 470 fields, 109 business rules, 498 messages, from the system as built</a:t>
+              <a:t>Content: 46 screens, 470 fields, 109 business rules, 525 messages, from the system as built</a:t>
             </a:r>
           </a:p>
           <a:p>

--- a/docs/deliverables/out/Drop-1_Transactional/BRD-01_New_Business/01_BIBS_GuideDeck_BRD-01_New_Business_v2.0.pptx
+++ b/docs/deliverables/out/Drop-1_Transactional/BRD-01_New_Business/01_BIBS_GuideDeck_BRD-01_New_Business_v2.0.pptx
@@ -6935,8 +6935,8 @@
         </p:blipFill>
         <p:spPr>
           <a:xfrm>
-            <a:off x="1953043" y="1325880"/>
-            <a:ext cx="2601241" cy="1874520"/>
+            <a:off x="1949650" y="1325880"/>
+            <a:ext cx="2608027" cy="1874520"/>
           </a:xfrm>
           <a:prstGeom prst="rect">
             <a:avLst/>
@@ -6999,8 +6999,8 @@
         </p:blipFill>
         <p:spPr>
           <a:xfrm>
-            <a:off x="7572260" y="1325880"/>
-            <a:ext cx="2731540" cy="1874520"/>
+            <a:off x="7568518" y="1325880"/>
+            <a:ext cx="2739024" cy="1874520"/>
           </a:xfrm>
           <a:prstGeom prst="rect">
             <a:avLst/>
@@ -7063,8 +7063,8 @@
         </p:blipFill>
         <p:spPr>
           <a:xfrm>
-            <a:off x="2062547" y="3566160"/>
-            <a:ext cx="2382233" cy="1874520"/>
+            <a:off x="2059702" y="3566160"/>
+            <a:ext cx="2387923" cy="1874520"/>
           </a:xfrm>
           <a:prstGeom prst="rect">
             <a:avLst/>
@@ -7127,8 +7127,8 @@
         </p:blipFill>
         <p:spPr>
           <a:xfrm>
-            <a:off x="8131352" y="3566160"/>
-            <a:ext cx="1613357" cy="1874520"/>
+            <a:off x="8133947" y="3566160"/>
+            <a:ext cx="1608167" cy="1874520"/>
           </a:xfrm>
           <a:prstGeom prst="rect">
             <a:avLst/>
@@ -7686,7 +7686,7 @@
                 </a:solidFill>
                 <a:latin typeface="Arial"/>
               </a:rPr>
-              <a:t>Full list: FRS chapter 13 per screen, 109 rules on the Business rules sheet and 498 messages in chapter 15 and on the Messages sheet</a:t>
+              <a:t>Full list: FRS chapter 13 per screen, 109 rules on the Business rules sheet and 503 messages in chapter 15 and on the Messages sheet</a:t>
             </a:r>
           </a:p>
         </p:txBody>
@@ -12124,7 +12124,7 @@
                 </a:solidFill>
                 <a:latin typeface="Arial"/>
               </a:rPr>
-              <a:t>Content: 46 screens, 470 fields, 109 business rules, 498 messages, from the system as built</a:t>
+              <a:t>Content: 46 screens, 470 fields, 109 business rules, 503 messages, from the system as built</a:t>
             </a:r>
           </a:p>
           <a:p>

--- a/docs/deliverables/out/Drop-1_Transactional/BRD-01_New_Business/01_BIBS_GuideDeck_BRD-01_New_Business_v2.0.pptx
+++ b/docs/deliverables/out/Drop-1_Transactional/BRD-01_New_Business/01_BIBS_GuideDeck_BRD-01_New_Business_v2.0.pptx
@@ -801,7 +801,7 @@
           <a:lstStyle/>
           <a:p>
             <a:r>
-              <a:t>The contract is part of the signed set. This contract is part of the signed BRD-1 set. A later change in BRD-2, BRD-3, BRD-4, BRD-5, BRD-6, BRD-9, BRD-10, BRD-11, BRD-12 or BRD-13, or in an external interface, that changes what New Business takes or hands over as listed here is raised as a change request against this signed set through the Change Management Register, with its effort in man-days, before it is built.</a:t>
+              <a:t>The contract is part of the signed set. This contract is part of the signed BRD-1 set. A later change in BRD-2, BRD-3, BRD-4, BRD-5, BRD-6, BRD-9, BRD-10, BRD-11, BRD-12 or BRD-13, or in an external interface, that changes what New Business takes or hands over as listed here is raised as a change request against this signed set through the Change Management Register, with its effort in man-days, before it is delivered.</a:t>
             </a:r>
           </a:p>
           <a:p>
@@ -1106,7 +1106,7 @@
           <a:lstStyle/>
           <a:p>
             <a:r>
-              <a:t>The sign-off meeting starts when the exit criteria are met; the set is done when the certificate is signed and the build is frozen.</a:t>
+              <a:t>The sign-off meeting starts when the exit criteria are met; the set is done when the certificate is signed and the content of the set is frozen.</a:t>
             </a:r>
           </a:p>
         </p:txBody>
@@ -1176,7 +1176,7 @@
           <a:lstStyle/>
           <a:p>
             <a:r>
-              <a:t>New Business is already built: handover means the build is frozen as signed and the approved deltas are scheduled.</a:t>
+              <a:t>After sign-off the content is frozen as signed and the approved deltas are scheduled.</a:t>
             </a:r>
           </a:p>
         </p:txBody>
@@ -1246,7 +1246,7 @@
           <a:lstStyle/>
           <a:p>
             <a:r>
-              <a:t>Nothing in a signed set changes without a request in the register. The as-built refresh at the end of the build re-issues the set with the system as delivered.</a:t>
+              <a:t>Nothing in a signed set changes without a request in the register.</a:t>
             </a:r>
           </a:p>
         </p:txBody>
@@ -1401,7 +1401,7 @@
           <a:lstStyle/>
           <a:p>
             <a:r>
-              <a:t>Stress that the pack describes the system as built on the status date, not a design.</a:t>
+              <a:t>Stress that the pack shows the screens, fields, rules and messages the business is asked to confirm.</a:t>
             </a:r>
           </a:p>
           <a:p>
@@ -1721,7 +1721,7 @@
           </a:p>
           <a:p>
             <a:r>
-              <a:t>7. Handover to development or build freeze: From Mon 2-Nov-2026.</a:t>
+              <a:t>7. Content freeze: From Mon 2-Nov-2026.</a:t>
             </a:r>
           </a:p>
           <a:p>
@@ -6434,7 +6434,7 @@
                           </a:solidFill>
                           <a:latin typeface="Arial"/>
                         </a:rPr>
-                        <a:t>9</a:t>
+                        <a:t>10</a:t>
                       </a:r>
                     </a:p>
                   </a:txBody>
@@ -6456,7 +6456,7 @@
                           </a:solidFill>
                           <a:latin typeface="Arial"/>
                         </a:rPr>
-                        <a:t>New Business Dashboard, My Work, Booking, New Business Reports, Broking Setup</a:t>
+                        <a:t>New Business Dashboard, My Work, Booking, Bulk Processing, New Business Reports, Broking Setup</a:t>
                       </a:r>
                     </a:p>
                   </a:txBody>
@@ -6524,7 +6524,7 @@
                           </a:solidFill>
                           <a:latin typeface="Arial"/>
                         </a:rPr>
-                        <a:t>9</a:t>
+                        <a:t>10</a:t>
                       </a:r>
                     </a:p>
                   </a:txBody>
@@ -6546,7 +6546,7 @@
                           </a:solidFill>
                           <a:latin typeface="Arial"/>
                         </a:rPr>
-                        <a:t>New Business Dashboard, My Work, Booking, New Business Reports, Broking Setup</a:t>
+                        <a:t>New Business Dashboard, My Work, Booking, Bulk Processing, New Business Reports, Broking Setup</a:t>
                       </a:r>
                     </a:p>
                   </a:txBody>
@@ -6935,8 +6935,8 @@
         </p:blipFill>
         <p:spPr>
           <a:xfrm>
-            <a:off x="1949650" y="1325880"/>
-            <a:ext cx="2608027" cy="1874520"/>
+            <a:off x="2007445" y="1325880"/>
+            <a:ext cx="2492436" cy="1874520"/>
           </a:xfrm>
           <a:prstGeom prst="rect">
             <a:avLst/>
@@ -6999,8 +6999,8 @@
         </p:blipFill>
         <p:spPr>
           <a:xfrm>
-            <a:off x="7568518" y="1325880"/>
-            <a:ext cx="2739024" cy="1874520"/>
+            <a:off x="7634793" y="1325880"/>
+            <a:ext cx="2606475" cy="1874520"/>
           </a:xfrm>
           <a:prstGeom prst="rect">
             <a:avLst/>
@@ -7063,8 +7063,8 @@
         </p:blipFill>
         <p:spPr>
           <a:xfrm>
-            <a:off x="2059702" y="3566160"/>
-            <a:ext cx="2387923" cy="1874520"/>
+            <a:off x="2376872" y="3566160"/>
+            <a:ext cx="1753583" cy="1874520"/>
           </a:xfrm>
           <a:prstGeom prst="rect">
             <a:avLst/>
@@ -7127,8 +7127,8 @@
         </p:blipFill>
         <p:spPr>
           <a:xfrm>
-            <a:off x="8133947" y="3566160"/>
-            <a:ext cx="1608167" cy="1874520"/>
+            <a:off x="7643719" y="3566160"/>
+            <a:ext cx="2588622" cy="1874520"/>
           </a:xfrm>
           <a:prstGeom prst="rect">
             <a:avLst/>
@@ -7686,7 +7686,7 @@
                 </a:solidFill>
                 <a:latin typeface="Arial"/>
               </a:rPr>
-              <a:t>Full list: FRS chapter 13 per screen, 109 rules on the Business rules sheet and 503 messages in chapter 15 and on the Messages sheet</a:t>
+              <a:t>Full list: FRS chapter 13 per screen, 109 rules on the Business rules sheet and 525 messages in chapter 15 and on the Messages sheet</a:t>
             </a:r>
           </a:p>
         </p:txBody>
@@ -8575,7 +8575,7 @@
                           </a:solidFill>
                           <a:latin typeface="Arial"/>
                         </a:rPr>
-                        <a:t>Built with a manual or file-based step now; the interface is a change request once the specification arrives.</a:t>
+                        <a:t>A manual or file-based step until the specification arrives; the interface is then a change request.</a:t>
                       </a:r>
                     </a:p>
                   </a:txBody>
@@ -8621,7 +8621,7 @@
                           </a:solidFill>
                           <a:latin typeface="Arial"/>
                         </a:rPr>
-                        <a:t>Open questions of FRS section 10.3 (product matrix, approval chain, document layouts, TSU thresholds and others) are built on the assumptions of section 10.1.</a:t>
+                        <a:t>Open questions of FRS section 10.3 (product matrix, approval chain, document layouts, TSU thresholds and others) follow the assumptions of section 10.1; chapter 21 lists the proposed rules for confirmation.</a:t>
                       </a:r>
                     </a:p>
                   </a:txBody>
@@ -9615,7 +9615,7 @@
                 </a:solidFill>
                 <a:latin typeface="Arial"/>
               </a:rPr>
-              <a:t>The set is built from the system as built and every screenshot is taken on the SIT environment with seed data.</a:t>
+              <a:t>Every screenshot of the set is taken on the SIT environment with seed data.</a:t>
             </a:r>
           </a:p>
           <a:p>
@@ -10105,7 +10105,7 @@
                 </a:solidFill>
                 <a:latin typeface="Arial"/>
               </a:rPr>
-              <a:t>Build frozen as signed; deltas listed in the Change Management Register with mandays.</a:t>
+              <a:t>Content frozen as signed; deltas listed in the Change Management Register with mandays.</a:t>
             </a:r>
           </a:p>
           <a:p>
@@ -10182,7 +10182,7 @@
                 </a:solidFill>
                 <a:latin typeface="Arial"/>
               </a:rPr>
-              <a:t>Handover to development: build readiness checklist</a:t>
+              <a:t>After sign-off: readiness checklist</a:t>
             </a:r>
           </a:p>
         </p:txBody>
@@ -10571,7 +10571,7 @@
                 </a:solidFill>
                 <a:latin typeface="Arial"/>
               </a:rPr>
-              <a:t>New Business is already built: handover means the build is frozen as signed and the approved deltas are scheduled.</a:t>
+              <a:t>After sign-off the content is frozen as signed and the approved deltas are scheduled.</a:t>
             </a:r>
           </a:p>
         </p:txBody>
@@ -12099,7 +12099,7 @@
                 </a:solidFill>
                 <a:latin typeface="Arial"/>
               </a:rPr>
-              <a:t>The pack shows New Business as built in BIBS, screen by screen, so each business unit confirms what it will get</a:t>
+              <a:t>The pack shows the proposed New Business of BIBS, screen by screen, so each business unit confirms what it will get</a:t>
             </a:r>
           </a:p>
           <a:p>
@@ -12124,7 +12124,7 @@
                 </a:solidFill>
                 <a:latin typeface="Arial"/>
               </a:rPr>
-              <a:t>Content: 46 screens, 470 fields, 109 business rules, 503 messages, from the system as built</a:t>
+              <a:t>Content: 46 screens, 471 fields, 109 business rules, 525 messages</a:t>
             </a:r>
           </a:p>
           <a:p>
@@ -13917,7 +13917,7 @@
                           </a:solidFill>
                           <a:latin typeface="Arial"/>
                         </a:rPr>
-                        <a:t>00 Start Here; 01 Guide deck; FRS chapters 1-3 (context and personas), 14 (walkthroughs) and 20 (sign-off); workbook Sign-off certificate</a:t>
+                        <a:t>00 Start Here; 01 Guide deck; FRS chapters 1-3 (context and personas), 14 (walkthroughs), 20 (sign-off) and 21 (proposed rules for confirmation); workbook Sign-off certificate</a:t>
                       </a:r>
                     </a:p>
                   </a:txBody>
@@ -15320,7 +15320,7 @@
                 </a:solidFill>
                 <a:latin typeface="Arial"/>
               </a:rPr>
-              <a:t>One consolidated comments log, each item typed (clarification, defect, change request) and answered; Q&amp;A minutes</a:t>
+              <a:t>One consolidated comments log, each item typed (clarification, correction, change request) and answered; Q&amp;A minutes</a:t>
             </a:r>
           </a:p>
         </p:txBody>
@@ -15972,7 +15972,7 @@
                 </a:solidFill>
                 <a:latin typeface="Arial"/>
               </a:rPr>
-              <a:t>Handover to development or build freeze</a:t>
+              <a:t>Content freeze</a:t>
             </a:r>
           </a:p>
         </p:txBody>
@@ -16006,7 +16006,7 @@
                 </a:solidFill>
                 <a:latin typeface="Arial"/>
               </a:rPr>
-              <a:t>Build frozen as signed; approved deltas scheduled in the Change Management Register</a:t>
+              <a:t>Content frozen as signed; approved deltas scheduled in the Change Management Register</a:t>
             </a:r>
           </a:p>
         </p:txBody>
@@ -16750,7 +16750,7 @@
                           </a:solidFill>
                           <a:latin typeface="Arial"/>
                         </a:rPr>
-                        <a:t>FRS v2.0, workbook, test plan, guide and deck built from the system as built</a:t>
+                        <a:t>FRS v2.0, workbook, test plan, guide and deck</a:t>
                       </a:r>
                     </a:p>
                   </a:txBody>
@@ -17108,7 +17108,7 @@
                           </a:solidFill>
                           <a:latin typeface="Arial"/>
                         </a:rPr>
-                        <a:t>One consolidated comments log, each item typed (clarification, defect, change request) and answered; Q&amp;A minutes</a:t>
+                        <a:t>One consolidated comments log, each item typed (clarification, correction, change request) and answered; Q&amp;A minutes</a:t>
                       </a:r>
                     </a:p>
                   </a:txBody>
@@ -17607,7 +17607,7 @@
                           </a:solidFill>
                           <a:latin typeface="Arial"/>
                         </a:rPr>
-                        <a:t>Agreed clarifications and defects</a:t>
+                        <a:t>Agreed clarifications and corrections</a:t>
                       </a:r>
                     </a:p>
                   </a:txBody>
@@ -17787,7 +17787,7 @@
                           </a:solidFill>
                           <a:latin typeface="Arial"/>
                         </a:rPr>
-                        <a:t>7. Handover to development or build freeze</a:t>
+                        <a:t>7. Content freeze</a:t>
                       </a:r>
                     </a:p>
                   </a:txBody>
@@ -17853,7 +17853,7 @@
                           </a:solidFill>
                           <a:latin typeface="Arial"/>
                         </a:rPr>
-                        <a:t>Build frozen as signed; approved deltas scheduled in the Change Management Register</a:t>
+                        <a:t>Content frozen as signed; approved deltas scheduled in the Change Management Register</a:t>
                       </a:r>
                     </a:p>
                   </a:txBody>
@@ -18287,7 +18287,7 @@
         <p:spPr>
           <a:xfrm>
             <a:off x="548640" y="1325880"/>
-            <a:ext cx="7498078" cy="1732166"/>
+            <a:ext cx="7498079" cy="1680490"/>
           </a:xfrm>
           <a:prstGeom prst="rect">
             <a:avLst/>

--- a/docs/deliverables/out/Drop-1_Transactional/BRD-01_New_Business/01_BIBS_GuideDeck_BRD-01_New_Business_v2.0.pptx
+++ b/docs/deliverables/out/Drop-1_Transactional/BRD-01_New_Business/01_BIBS_GuideDeck_BRD-01_New_Business_v2.0.pptx
@@ -1900,7 +1900,7 @@
           <a:lstStyle/>
           <a:p>
             <a:r>
-              <a:t>The files are numbered 00 to 05 so they sort in reading order in the BRD folder. 00 Start Here is the short version of this deck; 02 FRS and 03 workbook carry the same rows; 04 and 05 are the test plan traced to the screens.</a:t>
+              <a:t>The files are numbered in reading order so they sort that way in the BRD folder. 00 Start Here is the short version of this deck; 02 FRS and 03 workbook carry the same rows; 04 and 05 are the test plan traced to the screens; 07 to 09 are the UX screen documents for the BDOI UX Design team, taken from the same screens.</a:t>
             </a:r>
           </a:p>
         </p:txBody>
@@ -5373,7 +5373,7 @@
       <p:grpSpPr/>
       <p:pic>
         <p:nvPicPr>
-          <p:cNvPr id="2" name="Picture 1" descr="bdo-insure.png"/>
+          <p:cNvPr id="2" name="Picture 1" descr="client-logo.png"/>
           <p:cNvPicPr>
             <a:picLocks noChangeAspect="1"/>
           </p:cNvPicPr>
@@ -5732,7 +5732,7 @@
       </p:sp>
       <p:pic>
         <p:nvPicPr>
-          <p:cNvPr id="4" name="Picture 3" descr="bdo-insure.png"/>
+          <p:cNvPr id="4" name="Picture 3" descr="client-logo.png"/>
           <p:cNvPicPr>
             <a:picLocks noChangeAspect="1"/>
           </p:cNvPicPr>
@@ -6571,7 +6571,7 @@
       </p:sp>
       <p:pic>
         <p:nvPicPr>
-          <p:cNvPr id="4" name="Picture 3" descr="bdo-insure.png"/>
+          <p:cNvPr id="4" name="Picture 3" descr="client-logo.png"/>
           <p:cNvPicPr>
             <a:picLocks noChangeAspect="1"/>
           </p:cNvPicPr>
@@ -7342,7 +7342,7 @@
       </p:sp>
       <p:pic>
         <p:nvPicPr>
-          <p:cNvPr id="4" name="Picture 3" descr="bdo-insure.png"/>
+          <p:cNvPr id="4" name="Picture 3" descr="client-logo.png"/>
           <p:cNvPicPr>
             <a:picLocks noChangeAspect="1"/>
           </p:cNvPicPr>
@@ -7935,7 +7935,7 @@
       </p:sp>
       <p:pic>
         <p:nvPicPr>
-          <p:cNvPr id="4" name="Picture 3" descr="bdo-insure.png"/>
+          <p:cNvPr id="4" name="Picture 3" descr="client-logo.png"/>
           <p:cNvPicPr>
             <a:picLocks noChangeAspect="1"/>
           </p:cNvPicPr>
@@ -8267,7 +8267,7 @@
       </p:sp>
       <p:pic>
         <p:nvPicPr>
-          <p:cNvPr id="4" name="Picture 3" descr="bdo-insure.png"/>
+          <p:cNvPr id="4" name="Picture 3" descr="client-logo.png"/>
           <p:cNvPicPr>
             <a:picLocks noChangeAspect="1"/>
           </p:cNvPicPr>
@@ -9643,7 +9643,7 @@
       </p:sp>
       <p:pic>
         <p:nvPicPr>
-          <p:cNvPr id="4" name="Picture 3" descr="bdo-insure.png"/>
+          <p:cNvPr id="4" name="Picture 3" descr="client-logo.png"/>
           <p:cNvPicPr>
             <a:picLocks noChangeAspect="1"/>
           </p:cNvPicPr>
@@ -10021,8 +10021,8 @@
         </p:blipFill>
         <p:spPr>
           <a:xfrm>
-            <a:off x="7643719" y="3566160"/>
-            <a:ext cx="2588622" cy="1874520"/>
+            <a:off x="7520532" y="3566160"/>
+            <a:ext cx="2834997" cy="1874519"/>
           </a:xfrm>
           <a:prstGeom prst="rect">
             <a:avLst/>
@@ -10167,7 +10167,7 @@
       </p:sp>
       <p:pic>
         <p:nvPicPr>
-          <p:cNvPr id="4" name="Picture 3" descr="bdo-insure.png"/>
+          <p:cNvPr id="4" name="Picture 3" descr="client-logo.png"/>
           <p:cNvPicPr>
             <a:picLocks noChangeAspect="1"/>
           </p:cNvPicPr>
@@ -10580,7 +10580,7 @@
                 </a:solidFill>
                 <a:latin typeface="Arial"/>
               </a:rPr>
-              <a:t>Full list: FRS chapter 13 per screen, 109 rules on the Business rules sheet and 527 messages in FRS chapter 15 and on the Messages sheet</a:t>
+              <a:t>Full list: FRS chapter 13 per screen, 109 rules on the Business rules sheet and 526 messages in FRS chapter 15 and on the Messages sheet</a:t>
             </a:r>
           </a:p>
         </p:txBody>
@@ -10683,7 +10683,7 @@
       </p:sp>
       <p:pic>
         <p:nvPicPr>
-          <p:cNvPr id="4" name="Picture 3" descr="bdo-insure.png"/>
+          <p:cNvPr id="4" name="Picture 3" descr="client-logo.png"/>
           <p:cNvPicPr>
             <a:picLocks noChangeAspect="1"/>
           </p:cNvPicPr>
@@ -11015,7 +11015,7 @@
       </p:sp>
       <p:pic>
         <p:nvPicPr>
-          <p:cNvPr id="4" name="Picture 3" descr="bdo-insure.png"/>
+          <p:cNvPr id="4" name="Picture 3" descr="client-logo.png"/>
           <p:cNvPicPr>
             <a:picLocks noChangeAspect="1"/>
           </p:cNvPicPr>
@@ -11650,7 +11650,7 @@
       </p:sp>
       <p:pic>
         <p:nvPicPr>
-          <p:cNvPr id="4" name="Picture 3" descr="bdo-insure.png"/>
+          <p:cNvPr id="4" name="Picture 3" descr="client-logo.png"/>
           <p:cNvPicPr>
             <a:picLocks noChangeAspect="1"/>
           </p:cNvPicPr>
@@ -12174,7 +12174,7 @@
       </p:sp>
       <p:pic>
         <p:nvPicPr>
-          <p:cNvPr id="4" name="Picture 3" descr="bdo-insure.png"/>
+          <p:cNvPr id="4" name="Picture 3" descr="client-logo.png"/>
           <p:cNvPicPr>
             <a:picLocks noChangeAspect="1"/>
           </p:cNvPicPr>
@@ -12412,7 +12412,7 @@
                 </a:solidFill>
                 <a:latin typeface="Arial"/>
               </a:rPr>
-              <a:t>Content: 46 screens, 471 fields, 109 business rules, 527 messages</a:t>
+              <a:t>Content: 46 screens, 472 fields, 109 business rules, 526 messages</a:t>
             </a:r>
           </a:p>
           <a:p>
@@ -12640,7 +12640,7 @@
       </p:sp>
       <p:pic>
         <p:nvPicPr>
-          <p:cNvPr id="4" name="Picture 3" descr="bdo-insure.png"/>
+          <p:cNvPr id="4" name="Picture 3" descr="client-logo.png"/>
           <p:cNvPicPr>
             <a:picLocks noChangeAspect="1"/>
           </p:cNvPicPr>
@@ -13593,7 +13593,7 @@
       </p:sp>
       <p:pic>
         <p:nvPicPr>
-          <p:cNvPr id="4" name="Picture 3" descr="bdo-insure.png"/>
+          <p:cNvPr id="4" name="Picture 3" descr="client-logo.png"/>
           <p:cNvPicPr>
             <a:picLocks noChangeAspect="1"/>
           </p:cNvPicPr>
@@ -14034,7 +14034,7 @@
       </p:sp>
       <p:pic>
         <p:nvPicPr>
-          <p:cNvPr id="4" name="Picture 3" descr="bdo-insure.png"/>
+          <p:cNvPr id="4" name="Picture 3" descr="client-logo.png"/>
           <p:cNvPicPr>
             <a:picLocks noChangeAspect="1"/>
           </p:cNvPicPr>
@@ -14475,7 +14475,7 @@
       </p:sp>
       <p:pic>
         <p:nvPicPr>
-          <p:cNvPr id="4" name="Picture 3" descr="bdo-insure.png"/>
+          <p:cNvPr id="4" name="Picture 3" descr="client-logo.png"/>
           <p:cNvPicPr>
             <a:picLocks noChangeAspect="1"/>
           </p:cNvPicPr>
@@ -15246,7 +15246,7 @@
       </p:sp>
       <p:pic>
         <p:nvPicPr>
-          <p:cNvPr id="4" name="Picture 3" descr="bdo-insure.png"/>
+          <p:cNvPr id="4" name="Picture 3" descr="client-logo.png"/>
           <p:cNvPicPr>
             <a:picLocks noChangeAspect="1"/>
           </p:cNvPicPr>
@@ -15612,7 +15612,7 @@
       </p:sp>
       <p:pic>
         <p:nvPicPr>
-          <p:cNvPr id="4" name="Picture 3" descr="bdo-insure.png"/>
+          <p:cNvPr id="4" name="Picture 3" descr="client-logo.png"/>
           <p:cNvPicPr>
             <a:picLocks noChangeAspect="1"/>
           </p:cNvPicPr>
@@ -16538,7 +16538,7 @@
       </p:sp>
       <p:pic>
         <p:nvPicPr>
-          <p:cNvPr id="4" name="Picture 3" descr="bdo-insure.png"/>
+          <p:cNvPr id="4" name="Picture 3" descr="client-logo.png"/>
           <p:cNvPicPr>
             <a:picLocks noChangeAspect="1"/>
           </p:cNvPicPr>
@@ -17154,7 +17154,7 @@
       </p:sp>
       <p:pic>
         <p:nvPicPr>
-          <p:cNvPr id="4" name="Picture 3" descr="bdo-insure.png"/>
+          <p:cNvPr id="4" name="Picture 3" descr="client-logo.png"/>
           <p:cNvPicPr>
             <a:picLocks noChangeAspect="1"/>
           </p:cNvPicPr>
@@ -19280,7 +19280,7 @@
       </p:sp>
       <p:pic>
         <p:nvPicPr>
-          <p:cNvPr id="4" name="Picture 3" descr="bdo-insure.png"/>
+          <p:cNvPr id="4" name="Picture 3" descr="client-logo.png"/>
           <p:cNvPicPr>
             <a:picLocks noChangeAspect="1"/>
           </p:cNvPicPr>
@@ -20137,7 +20137,7 @@
       </p:sp>
       <p:pic>
         <p:nvPicPr>
-          <p:cNvPr id="4" name="Picture 3" descr="bdo-insure.png"/>
+          <p:cNvPr id="4" name="Picture 3" descr="client-logo.png"/>
           <p:cNvPicPr>
             <a:picLocks noChangeAspect="1"/>
           </p:cNvPicPr>
@@ -20994,7 +20994,7 @@
       </p:sp>
       <p:pic>
         <p:nvPicPr>
-          <p:cNvPr id="4" name="Picture 3" descr="bdo-insure.png"/>
+          <p:cNvPr id="4" name="Picture 3" descr="client-logo.png"/>
           <p:cNvPicPr>
             <a:picLocks noChangeAspect="1"/>
           </p:cNvPicPr>
@@ -21963,7 +21963,7 @@
       </p:sp>
       <p:pic>
         <p:nvPicPr>
-          <p:cNvPr id="4" name="Picture 3" descr="bdo-insure.png"/>
+          <p:cNvPr id="4" name="Picture 3" descr="client-logo.png"/>
           <p:cNvPicPr>
             <a:picLocks noChangeAspect="1"/>
           </p:cNvPicPr>

--- a/docs/deliverables/out/Drop-1_Transactional/BRD-01_New_Business/01_BIBS_GuideDeck_BRD-01_New_Business_v2.0.pptx
+++ b/docs/deliverables/out/Drop-1_Transactional/BRD-01_New_Business/01_BIBS_GuideDeck_BRD-01_New_Business_v2.0.pptx
@@ -10757,8 +10757,8 @@
         </p:blipFill>
         <p:spPr>
           <a:xfrm>
-            <a:off x="2007445" y="1325880"/>
-            <a:ext cx="2492436" cy="1874520"/>
+            <a:off x="2578836" y="1325880"/>
+            <a:ext cx="1349654" cy="1874520"/>
           </a:xfrm>
           <a:prstGeom prst="rect">
             <a:avLst/>
@@ -10885,8 +10885,8 @@
         </p:blipFill>
         <p:spPr>
           <a:xfrm>
-            <a:off x="2376872" y="3566160"/>
-            <a:ext cx="1753583" cy="1874520"/>
+            <a:off x="2592336" y="3566160"/>
+            <a:ext cx="1322654" cy="1874520"/>
           </a:xfrm>
           <a:prstGeom prst="rect">
             <a:avLst/>
@@ -10949,8 +10949,8 @@
         </p:blipFill>
         <p:spPr>
           <a:xfrm>
-            <a:off x="7520532" y="3566160"/>
-            <a:ext cx="2834997" cy="1874519"/>
+            <a:off x="7452755" y="3566160"/>
+            <a:ext cx="2970550" cy="1874520"/>
           </a:xfrm>
           <a:prstGeom prst="rect">
             <a:avLst/>
